--- a/Reporte 030926.pptx
+++ b/Reporte 030926.pptx
@@ -5,7 +5,7 @@
     <p:sldMasterId id="2147483672" r:id="rId1"/>
   </p:sldMasterIdLst>
   <p:notesMasterIdLst>
-    <p:notesMasterId r:id="rId19"/>
+    <p:notesMasterId r:id="rId18"/>
   </p:notesMasterIdLst>
   <p:sldIdLst>
     <p:sldId id="350" r:id="rId2"/>
@@ -23,23 +23,22 @@
     <p:sldId id="412" r:id="rId14"/>
     <p:sldId id="371" r:id="rId15"/>
     <p:sldId id="413" r:id="rId16"/>
-    <p:sldId id="414" r:id="rId17"/>
-    <p:sldId id="280" r:id="rId18"/>
+    <p:sldId id="280" r:id="rId17"/>
   </p:sldIdLst>
   <p:sldSz cx="9144000" cy="5143500" type="screen16x9"/>
   <p:notesSz cx="6858000" cy="9144000"/>
   <p:embeddedFontLst>
     <p:embeddedFont>
       <p:font typeface="Montserrat" panose="00000500000000000000" pitchFamily="2" charset="0"/>
-      <p:regular r:id="rId20"/>
-      <p:bold r:id="rId21"/>
-      <p:italic r:id="rId22"/>
-      <p:boldItalic r:id="rId23"/>
+      <p:regular r:id="rId19"/>
+      <p:bold r:id="rId20"/>
+      <p:italic r:id="rId21"/>
+      <p:boldItalic r:id="rId22"/>
     </p:embeddedFont>
     <p:embeddedFont>
       <p:font typeface="Montserrat Black" panose="00000A00000000000000" pitchFamily="2" charset="0"/>
-      <p:bold r:id="rId24"/>
-      <p:boldItalic r:id="rId25"/>
+      <p:bold r:id="rId23"/>
+      <p:boldItalic r:id="rId24"/>
     </p:embeddedFont>
   </p:embeddedFontLst>
   <p:defaultTextStyle>
@@ -6551,10 +6550,10 @@
       </p:sp>
       <p:pic>
         <p:nvPicPr>
-          <p:cNvPr id="4" name="Imagen 3">
+          <p:cNvPr id="5" name="Imagen 4">
             <a:extLst>
               <a:ext uri="{FF2B5EF4-FFF2-40B4-BE49-F238E27FC236}">
-                <a16:creationId xmlns:a16="http://schemas.microsoft.com/office/drawing/2014/main" id="{C665631E-D63C-AB46-8B15-A84215D1ACEA}"/>
+                <a16:creationId xmlns:a16="http://schemas.microsoft.com/office/drawing/2014/main" id="{ACE6220A-0D75-4C3D-C78C-8F4CF445B9A0}"/>
               </a:ext>
             </a:extLst>
           </p:cNvPr>
@@ -6571,8 +6570,8 @@
         </p:blipFill>
         <p:spPr>
           <a:xfrm>
-            <a:off x="0" y="931553"/>
-            <a:ext cx="9144000" cy="3423269"/>
+            <a:off x="0" y="951827"/>
+            <a:ext cx="9144000" cy="3382722"/>
           </a:xfrm>
           <a:prstGeom prst="rect">
             <a:avLst/>
@@ -6657,10 +6656,10 @@
       </p:sp>
       <p:pic>
         <p:nvPicPr>
-          <p:cNvPr id="3" name="Imagen 2">
+          <p:cNvPr id="4" name="Imagen 3">
             <a:extLst>
               <a:ext uri="{FF2B5EF4-FFF2-40B4-BE49-F238E27FC236}">
-                <a16:creationId xmlns:a16="http://schemas.microsoft.com/office/drawing/2014/main" id="{CE32CE3E-17B5-F4A8-F972-EE96E32CBE1B}"/>
+                <a16:creationId xmlns:a16="http://schemas.microsoft.com/office/drawing/2014/main" id="{A7A6B752-ABCE-C635-F898-4BCF5993C8DE}"/>
               </a:ext>
             </a:extLst>
           </p:cNvPr>
@@ -6677,8 +6676,8 @@
         </p:blipFill>
         <p:spPr>
           <a:xfrm>
-            <a:off x="0" y="1337988"/>
-            <a:ext cx="9144000" cy="2610399"/>
+            <a:off x="0" y="1343430"/>
+            <a:ext cx="9144000" cy="2599516"/>
           </a:xfrm>
           <a:prstGeom prst="rect">
             <a:avLst/>
@@ -6763,10 +6762,10 @@
       </p:sp>
       <p:pic>
         <p:nvPicPr>
-          <p:cNvPr id="5" name="Imagen 4">
+          <p:cNvPr id="4" name="Imagen 3">
             <a:extLst>
               <a:ext uri="{FF2B5EF4-FFF2-40B4-BE49-F238E27FC236}">
-                <a16:creationId xmlns:a16="http://schemas.microsoft.com/office/drawing/2014/main" id="{EDD1AEB9-B9CE-B3B4-350C-C203B65AFA51}"/>
+                <a16:creationId xmlns:a16="http://schemas.microsoft.com/office/drawing/2014/main" id="{40AB2B79-4875-E5D7-6461-EAC08BB622AE}"/>
               </a:ext>
             </a:extLst>
           </p:cNvPr>
@@ -6783,8 +6782,8 @@
         </p:blipFill>
         <p:spPr>
           <a:xfrm>
-            <a:off x="0" y="769199"/>
-            <a:ext cx="9144000" cy="3747977"/>
+            <a:off x="0" y="1069451"/>
+            <a:ext cx="9144000" cy="3147473"/>
           </a:xfrm>
           <a:prstGeom prst="rect">
             <a:avLst/>
@@ -6869,10 +6868,10 @@
       </p:sp>
       <p:pic>
         <p:nvPicPr>
-          <p:cNvPr id="3" name="Imagen 2">
+          <p:cNvPr id="4" name="Imagen 3">
             <a:extLst>
               <a:ext uri="{FF2B5EF4-FFF2-40B4-BE49-F238E27FC236}">
-                <a16:creationId xmlns:a16="http://schemas.microsoft.com/office/drawing/2014/main" id="{DE91798E-80A1-91B6-7250-DFB94D002B25}"/>
+                <a16:creationId xmlns:a16="http://schemas.microsoft.com/office/drawing/2014/main" id="{BC8F227A-46D0-066F-0B7B-8F51E5B9F1D8}"/>
               </a:ext>
             </a:extLst>
           </p:cNvPr>
@@ -6889,8 +6888,8 @@
         </p:blipFill>
         <p:spPr>
           <a:xfrm>
-            <a:off x="-6725" y="1341261"/>
-            <a:ext cx="9144000" cy="2603853"/>
+            <a:off x="-6725" y="1350328"/>
+            <a:ext cx="9144000" cy="2585720"/>
           </a:xfrm>
           <a:prstGeom prst="rect">
             <a:avLst/>
@@ -6975,10 +6974,10 @@
       </p:sp>
       <p:pic>
         <p:nvPicPr>
-          <p:cNvPr id="3" name="Imagen 2">
+          <p:cNvPr id="4" name="Imagen 3">
             <a:extLst>
               <a:ext uri="{FF2B5EF4-FFF2-40B4-BE49-F238E27FC236}">
-                <a16:creationId xmlns:a16="http://schemas.microsoft.com/office/drawing/2014/main" id="{C783AA7A-D4CF-E8EA-B816-ED6E4C291765}"/>
+                <a16:creationId xmlns:a16="http://schemas.microsoft.com/office/drawing/2014/main" id="{0E41BA12-CC96-715F-A0BA-430950D67A96}"/>
               </a:ext>
             </a:extLst>
           </p:cNvPr>
@@ -6995,8 +6994,8 @@
         </p:blipFill>
         <p:spPr>
           <a:xfrm>
-            <a:off x="0" y="703321"/>
-            <a:ext cx="9144000" cy="3879734"/>
+            <a:off x="0" y="741235"/>
+            <a:ext cx="9144000" cy="3905830"/>
           </a:xfrm>
           <a:prstGeom prst="rect">
             <a:avLst/>
@@ -7087,10 +7086,10 @@
       </p:sp>
       <p:pic>
         <p:nvPicPr>
-          <p:cNvPr id="4" name="Imagen 3">
+          <p:cNvPr id="3" name="Imagen 2">
             <a:extLst>
               <a:ext uri="{FF2B5EF4-FFF2-40B4-BE49-F238E27FC236}">
-                <a16:creationId xmlns:a16="http://schemas.microsoft.com/office/drawing/2014/main" id="{160617DC-89EC-622D-6324-512A9D63EB66}"/>
+                <a16:creationId xmlns:a16="http://schemas.microsoft.com/office/drawing/2014/main" id="{C818FD7F-06AC-4CB4-989E-1A0A57C3AA7F}"/>
               </a:ext>
             </a:extLst>
           </p:cNvPr>
@@ -7107,8 +7106,8 @@
         </p:blipFill>
         <p:spPr>
           <a:xfrm>
-            <a:off x="0" y="395912"/>
-            <a:ext cx="9144000" cy="1794333"/>
+            <a:off x="287488" y="385477"/>
+            <a:ext cx="8496000" cy="4758023"/>
           </a:xfrm>
           <a:prstGeom prst="rect">
             <a:avLst/>
@@ -7129,118 +7128,6 @@
 </file>
 
 <file path=ppt/slides/slide16.xml><?xml version="1.0" encoding="utf-8"?>
-<p:sld xmlns:a="http://schemas.openxmlformats.org/drawingml/2006/main" xmlns:r="http://schemas.openxmlformats.org/officeDocument/2006/relationships" xmlns:p="http://schemas.openxmlformats.org/presentationml/2006/main">
-  <p:cSld>
-    <p:bg>
-      <p:bgPr>
-        <a:solidFill>
-          <a:srgbClr val="F8F9FA"/>
-        </a:solidFill>
-        <a:effectLst/>
-      </p:bgPr>
-    </p:bg>
-    <p:spTree>
-      <p:nvGrpSpPr>
-        <p:cNvPr id="1" name="">
-          <a:extLst>
-            <a:ext uri="{FF2B5EF4-FFF2-40B4-BE49-F238E27FC236}">
-              <a16:creationId xmlns:a16="http://schemas.microsoft.com/office/drawing/2014/main" id="{F954BB7A-33F4-53F8-05A5-314B8726D508}"/>
-            </a:ext>
-          </a:extLst>
-        </p:cNvPr>
-        <p:cNvGrpSpPr/>
-        <p:nvPr/>
-      </p:nvGrpSpPr>
-      <p:grpSpPr>
-        <a:xfrm>
-          <a:off x="0" y="0"/>
-          <a:ext cx="0" cy="0"/>
-          <a:chOff x="0" y="0"/>
-          <a:chExt cx="0" cy="0"/>
-        </a:xfrm>
-      </p:grpSpPr>
-      <p:sp>
-        <p:nvSpPr>
-          <p:cNvPr id="5" name="CuadroTexto 4">
-            <a:extLst>
-              <a:ext uri="{FF2B5EF4-FFF2-40B4-BE49-F238E27FC236}">
-                <a16:creationId xmlns:a16="http://schemas.microsoft.com/office/drawing/2014/main" id="{FC0404B5-4456-F36A-2986-E1E32444A99E}"/>
-              </a:ext>
-            </a:extLst>
-          </p:cNvPr>
-          <p:cNvSpPr txBox="1"/>
-          <p:nvPr/>
-        </p:nvSpPr>
-        <p:spPr>
-          <a:xfrm>
-            <a:off x="1926166" y="88135"/>
-            <a:ext cx="5291667" cy="307777"/>
-          </a:xfrm>
-          <a:prstGeom prst="rect">
-            <a:avLst/>
-          </a:prstGeom>
-          <a:noFill/>
-        </p:spPr>
-        <p:txBody>
-          <a:bodyPr wrap="square" rtlCol="0">
-            <a:spAutoFit/>
-          </a:bodyPr>
-          <a:lstStyle/>
-          <a:p>
-            <a:pPr algn="ctr"/>
-            <a:r>
-              <a:rPr lang="es-MX" b="1" dirty="0">
-                <a:latin typeface="Montserrat" pitchFamily="2" charset="0"/>
-              </a:rPr>
-              <a:t>Opinión emitida por radioescuchas</a:t>
-            </a:r>
-          </a:p>
-        </p:txBody>
-      </p:sp>
-      <p:pic>
-        <p:nvPicPr>
-          <p:cNvPr id="3" name="Imagen 2">
-            <a:extLst>
-              <a:ext uri="{FF2B5EF4-FFF2-40B4-BE49-F238E27FC236}">
-                <a16:creationId xmlns:a16="http://schemas.microsoft.com/office/drawing/2014/main" id="{B1359560-B016-C654-8778-5138EF539062}"/>
-              </a:ext>
-            </a:extLst>
-          </p:cNvPr>
-          <p:cNvPicPr>
-            <a:picLocks noChangeAspect="1"/>
-          </p:cNvPicPr>
-          <p:nvPr/>
-        </p:nvPicPr>
-        <p:blipFill>
-          <a:blip r:embed="rId2"/>
-          <a:stretch>
-            <a:fillRect/>
-          </a:stretch>
-        </p:blipFill>
-        <p:spPr>
-          <a:xfrm>
-            <a:off x="763044" y="0"/>
-            <a:ext cx="2045112" cy="5143500"/>
-          </a:xfrm>
-          <a:prstGeom prst="rect">
-            <a:avLst/>
-          </a:prstGeom>
-        </p:spPr>
-      </p:pic>
-    </p:spTree>
-    <p:extLst>
-      <p:ext uri="{BB962C8B-B14F-4D97-AF65-F5344CB8AC3E}">
-        <p14:creationId xmlns:p14="http://schemas.microsoft.com/office/powerpoint/2010/main" val="457865431"/>
-      </p:ext>
-    </p:extLst>
-  </p:cSld>
-  <p:clrMapOvr>
-    <a:masterClrMapping/>
-  </p:clrMapOvr>
-</p:sld>
-</file>
-
-<file path=ppt/slides/slide17.xml><?xml version="1.0" encoding="utf-8"?>
 <p:sld xmlns:a="http://schemas.openxmlformats.org/drawingml/2006/main" xmlns:r="http://schemas.openxmlformats.org/officeDocument/2006/relationships" xmlns:p="http://schemas.openxmlformats.org/presentationml/2006/main">
   <p:cSld>
     <p:spTree>
